--- a/docs/deck/TriageLine_Submission_PRISM_2026.pptx
+++ b/docs/deck/TriageLine_Submission_PRISM_2026.pptx
@@ -20784,7 +20784,7 @@
                 <a:cs typeface="Times New Roman" panose="02020603050405020304" pitchFamily="18" charset="0"/>
                 <a:sym typeface="Calibri"/>
               </a:rPr>
-              <a:t>, judge off): turn-take 99/100; tool-selection 86.4%; argument acc. 55.2%; strict pass 45/100; avg latency 5.01 s</a:t>
+              <a:t>, judge off): turn-take 99/100; tool-selection 84.8%; argument acc. 60.1%; strict pass 50/100; avg latency 5.29 s</a:t>
             </a:r>
           </a:p>
           <a:p>
